--- a/docs/briefs/dexory.pptx
+++ b/docs/briefs/dexory.pptx
@@ -513,27 +513,27 @@
           </a:p>
           <a:p>
             <a:r>
-              <a:t>- When Storage Health flags a damaged pallet wrongly at a customer site, how do you trace that back to training data today, and how long does the loop take?</a:t>
-            </a:r>
-          </a:p>
-          <a:p>
-            <a:r>
-              <a:t>- How do you currently decide which of the millions of scan frames get labelled, and who does the labelling?</a:t>
-            </a:r>
-          </a:p>
-          <a:p>
-            <a:r>
-              <a:t>- The Senior Data Engineer ad talks about modelling perception accuracy per site against SLAs. Is that number produced today, and is it something perception can slice by class and scan condition or only in aggregate?</a:t>
-            </a:r>
-          </a:p>
-          <a:p>
-            <a:r>
-              <a:t>- For the new classes, are you labelling on 2D camera frames, on the LIDAR point cloud, or both, and does the same object need to be consistent across them?</a:t>
-            </a:r>
-          </a:p>
-          <a:p>
-            <a:r>
-              <a:t>- What is in place already for annotation and evaluation, is it internal tooling, an outsourced vendor, or open source, and what would have to be true for you to change it?</a:t>
+              <a:t>- When you added the Storage Health classes, how many frames did you label to get the first usable model, and how did you choose those frames out of the daily scans?</a:t>
+            </a:r>
+          </a:p>
+          <a:p>
+            <a:r>
+              <a:t>- Across a week of scans at one site, what proportion do you actually keep for training, and what decides that today?</a:t>
+            </a:r>
+          </a:p>
+          <a:p>
+            <a:r>
+              <a:t>- When a site misses its perception accuracy SLA, how long does it take to find out whether it is lighting, blur, obstruction, rack type or a genuine model gap?</a:t>
+            </a:r>
+          </a:p>
+          <a:p>
+            <a:r>
+              <a:t>- Who labels today: internal ops reviewers, an outsourced vendor, or a tool your team built, and what is the per-class cost of that?</a:t>
+            </a:r>
+          </a:p>
+          <a:p>
+            <a:r>
+              <a:t>- The Senior Data Engineer ad mentions modelling perception accuracy against per-site SLAs in Databricks. Is that metric currently produced by the perception team by hand?</a:t>
             </a:r>
           </a:p>
         </p:txBody>
@@ -613,27 +613,22 @@
           </a:p>
           <a:p>
             <a:r>
-              <a:t>- Strong internal build culture: a robotics company with its own autonomy and perception teams often has home-grown labelling and eval scripts, and the new data hire's remit explicitly includes pragmatic build-versus-buy decisions.</a:t>
-            </a:r>
-          </a:p>
-          <a:p>
-            <a:r>
-              <a:t>- No perception or ML job ad in the signals, so we do not know whether the perception team is growing or whether labelling volume is actually painful right now. The evidence for the specific pain is inferred, not stated.</a:t>
-            </a:r>
-          </a:p>
-          <a:p>
-            <a:r>
-              <a:t>- Budget sits with a company still standing up its first company-wide data capability; a tooling purchase may wait for that foundation and for the Databricks decisions to settle.</a:t>
-            </a:r>
-          </a:p>
-          <a:p>
-            <a:r>
-              <a:t>- Customer imagery from live warehouse sites may carry contractual restrictions on third-party processing, which needs the data-stays-in-your-bucket story landed early with whoever owns Dexory's data security requirements.</a:t>
-            </a:r>
-          </a:p>
-          <a:p>
-            <a:r>
-              <a:t>- Competitive pressure from Scale, Labelbox or an incumbent already embedded with the perception team.</a:t>
+              <a:t>- Strong build instinct: they are hiring a founding data engineer on Databricks and may treat curation and evaluation as internal platform work rather than a bought tool.</a:t>
+            </a:r>
+          </a:p>
+          <a:p>
+            <a:r>
+              <a:t>- The evidence is about business and SLA data, not labelling pain; no perception or annotation job ad, so the hypotheses are inferred rather than observed.</a:t>
+            </a:r>
+          </a:p>
+          <a:p>
+            <a:r>
+              <a:t>- Data access and security review: customer warehouse imagery under contract, so expect SOC2, GDPR and per-customer consent hurdles before a POV on real scans.</a:t>
+            </a:r>
+          </a:p>
+          <a:p>
+            <a:r>
+              <a:t>- Cost discipline signals (CFO profile, subscription model, ROI calculator) mean any tool spend must map to labelling cost per site, and a cheaper incumbent (Roboflow, V7, a BPO with its own tool) may be good enough.</a:t>
             </a:r>
           </a:p>
         </p:txBody>
@@ -3800,7 +3795,7 @@
                 </a:solidFill>
                 <a:latin typeface="Calibri"/>
               </a:rPr>
-              <a:t>Prepared 2026-09-20</a:t>
+              <a:t>Prepared 2026-09-28</a:t>
             </a:r>
           </a:p>
           <a:p>
@@ -3910,7 +3905,7 @@
                 </a:solidFill>
                 <a:latin typeface="Calibri"/>
               </a:rPr>
-              <a:t>Dexory scans the same racking every day, so the hard problem is not labelling more frames but choosing the few thousand frames that actually teach the new Storage Health classes, and proving per-site perception accuracy to the SLA numbers the business has committed to.</a:t>
+              <a:t>Dexory's cost of adding a new Integrity class scales with the number of daily scans rather than with what the model actually learns, and curation plus per-site model evaluation is where that breaks.</a:t>
             </a:r>
           </a:p>
         </p:txBody>
@@ -4206,7 +4201,7 @@
                 </a:solidFill>
                 <a:latin typeface="Calibri"/>
               </a:rPr>
-              <a:t>Dexory builds autonomous scanning robots and the DexoryView platform, sold as a monthly per-site subscription to 3PLs and large warehouse operators such as Ziegler, Romark Logistics and Seac. The robots drive aisles daily, read location labels and stock, and the Integrity module flags inventory discrepancies, hygiene or damage risks and rack compliance issues, while Optimise covers slotting and space utilisation. Storage Health (launched Feb 2026) extends this into damaged stock and leaning pallet detection, which needs label classes that did not exist a year ago.</a:t>
+              <a:t>Autonomous scanning robots drive warehouse aisles daily and turn scan data into DexoryView: real-time inventory accuracy, plus Integrity (inventory discrepancies, hygiene or damage risks, rack compliance) and Optimise (slotting, space utilisation, consolidation). Buyers are 3PLs and manufacturers such as Ziegler, Romark Logistics, Seac and Stellantis, on a monthly per-site subscription, roughly $28.6m est. ARR.</a:t>
             </a:r>
           </a:p>
         </p:txBody>
@@ -4367,7 +4362,7 @@
                 </a:solidFill>
                 <a:latin typeface="Calibri"/>
               </a:rPr>
-              <a:t>Robot drives the aisle on a scheduled mission, capturing camera imagery plus LIDAR and pose, with RFID or barcode reads tied to a rack location (guess: multi-camera vertical mast, several passes per rack face).</a:t>
+              <a:t>Robot runs a scheduled mission per aisle, capturing camera imagery plus LIDAR and barcode or RFID reads with pose and location metadata (mission scheduling confirmed by site; sensor mix is our guess).</a:t>
             </a:r>
           </a:p>
         </p:txBody>
@@ -4489,7 +4484,7 @@
                 </a:solidFill>
                 <a:latin typeface="Calibri"/>
               </a:rPr>
-              <a:t>Scan data lands in cloud object storage per site and per mission, likely S3 or Azure given a Databricks lakehouse is named in the Senior Data Engineer ad (guess).</a:t>
+              <a:t>Scans upload to cloud object storage and are keyed to site, aisle, rack and location; volumes are millions of near-identical shelf frames per site per week (our guess on scale).</a:t>
             </a:r>
           </a:p>
         </p:txBody>
@@ -4611,7 +4606,7 @@
                 </a:solidFill>
                 <a:latin typeface="Calibri"/>
               </a:rPr>
-              <a:t>Perception models run inventory presence, location label reading and now Storage Health damage or lean classification; outputs are reconciled against the customer WMS to produce discrepancies.</a:t>
+              <a:t>Perception models read location contents, barcodes and empties, and Integrity models flag damage, hygiene and rack compliance; discrepancies are reconciled against the customer's WMS.</a:t>
             </a:r>
           </a:p>
         </p:txBody>
@@ -4733,7 +4728,7 @@
                 </a:solidFill>
                 <a:latin typeface="Calibri"/>
               </a:rPr>
-              <a:t>Training data is selected ad hoc from failure reports and customer escalations, then sent to an internal or outsourced labelling effort (guess: mixture of in-house tooling and a BPO).</a:t>
+              <a:t>Labelling for new classes such as damaged stock or leaning pallets is likely a mix of internal review and an outsourced or managed workforce, driven by whatever frames look interesting (guess).</a:t>
             </a:r>
           </a:p>
         </p:txBody>
@@ -4855,7 +4850,7 @@
                 </a:solidFill>
                 <a:latin typeface="Calibri"/>
               </a:rPr>
-              <a:t>Model evaluation appears to be per-release and aggregate; the job ad implies perception accuracy is not yet modelled per site against contracted SLAs.</a:t>
+              <a:t>Operational and perception signals land in a lakehouse: the Senior Data Engineer ad names Databricks, perception accuracy, scan and mission performance, obstructions and scan coverage against per-site SLAs.</a:t>
             </a:r>
           </a:p>
         </p:txBody>
@@ -4977,7 +4972,7 @@
                 </a:solidFill>
                 <a:latin typeface="Calibri"/>
               </a:rPr>
-              <a:t>New classes such as damaged stock and leaning pallets are bootstrapped from a small hand-picked set, which is why recall on rare damage types is likely the current bottleneck (guess).</a:t>
+              <a:t>Model performance is reported per site in dashboards; failure analysis by scene condition or class slice is probably manual (guess).</a:t>
             </a:r>
           </a:p>
         </p:txBody>
@@ -5361,7 +5356,7 @@
                 </a:solidFill>
                 <a:latin typeface="Calibri"/>
               </a:rPr>
-              <a:t>Massive redundancy: the same rack face is imaged on every pass, every day, across many sites, so labelling budget is spent on near-duplicate frames while rare damage and lean events stay under-represented.</a:t>
+              <a:t>Daily repeat scans of the same racking mean labelling budget buys mostly duplicates, so cost grows with fleet and site count instead of with model accuracy.</a:t>
             </a:r>
           </a:p>
         </p:txBody>
@@ -5439,7 +5434,7 @@
                 </a:solidFill>
                 <a:latin typeface="Calibri"/>
               </a:rPr>
-              <a:t>Website: automated daily scans across multiple warehouses, monthly subscription scaling to more sites; our note of three passes per rack and millions of near-identical shelf images per site per week.</a:t>
+              <a:t>Site text: automated daily scans, scale across multiple sites without disruption; our note on millions of near-identical shelf images per site per week.</a:t>
             </a:r>
           </a:p>
         </p:txBody>
@@ -5517,7 +5512,7 @@
                 </a:solidFill>
                 <a:latin typeface="Calibri"/>
               </a:rPr>
-              <a:t>Index registers the existing buckets without moving data, computes embeddings and per-frame quality metrics (brightness, sharpness, uniqueness), then similarity search and the embedding plot let the team de-duplicate passes and build Collections of the rare cases. Our own simulated warehouse-robot run cut frames to label by 61 percent while keeping 95 percent of racks, and a YOLOv8n on the curated pick scored 0.48 mAP50 against 0.43 on a random pick of the same size.</a:t>
+              <a:t>Index registers the frames in Dexory's own bucket, computes embeddings and per-frame metrics (sharpness, brightness, uniqueness), then similarity search and diversity sampling build a Collection to label. Our warehouse-robot benchmark cut frames to label by 61% keeping 95% of racks.</a:t>
             </a:r>
           </a:p>
         </p:txBody>
@@ -5683,7 +5678,7 @@
                 </a:solidFill>
                 <a:latin typeface="Calibri"/>
               </a:rPr>
-              <a:t>Per-site perception accuracy is not answerable on demand, so SLA conversations with customers rely on spreadsheets rather than a model evaluation view sliced by site, class and scan conditions.</a:t>
+              <a:t>New Integrity classes like damaged stock, leaning pallets and hygiene risks are rare, subjective and expensive to bootstrap, so early label quality and class definitions drift between annotators.</a:t>
             </a:r>
           </a:p>
         </p:txBody>
@@ -5761,7 +5756,7 @@
                 </a:solidFill>
                 <a:latin typeface="Calibri"/>
               </a:rPr>
-              <a:t>Senior Data Engineer ad: 'modelling perception accuracy, scan and mission performance, obstructions and scan coverage ... against the SLAs and KPIs we have committed to per site'.</a:t>
+              <a:t>Storage Health launched Feb 2026; site text lists damage risks and rack compliance under the Integrity module as ML-flagged outputs.</a:t>
             </a:r>
           </a:p>
         </p:txBody>
@@ -5839,7 +5834,7 @@
                 </a:solidFill>
                 <a:latin typeface="Calibri"/>
               </a:rPr>
-              <a:t>Active imports predictions and gives mAP, mAR, F1, PR curves and confusion matrix sliced by class, IoU threshold and any data metric, so you can slice accuracy by site, aisle lighting or blur. Metric-to-failure correlation then tells you which data to label next, and results are pullable via SDK into the Databricks layer the new data hire is building.</a:t>
+              <a:t>Annotate ontology with objects plus attributes pins the definition of damaged versus leaning versus non-compliant; SAM 3 and object tracking across video speed up masks; Agents run a Dexory model or foundation model as a pre-label stage; Active finds label errors.</a:t>
             </a:r>
           </a:p>
         </p:txBody>
@@ -6005,7 +6000,7 @@
                 </a:solidFill>
                 <a:latin typeface="Calibri"/>
               </a:rPr>
-              <a:t>New Storage Health classes (damaged stock, leaning pallets, rack compliance) need a fresh ontology and fresh labels, and early label quality for subjective classes like damage drifts between annotators.</a:t>
+              <a:t>Per-site perception accuracy is reported but not diagnosable: no easy way to see which conditions (blur, low light, obstruction, rack type) drive misses, or what to label next.</a:t>
             </a:r>
           </a:p>
         </p:txBody>
@@ -6083,7 +6078,7 @@
                 </a:solidFill>
                 <a:latin typeface="Calibri"/>
               </a:rPr>
-              <a:t>Our note that Storage Health launched Feb 2026; website lists damage risks, hygiene and rack compliance under the Integrity module as ML-flagged items.</a:t>
+              <a:t>Job ad: model perception accuracy, scan and mission performance, obstructions and scan coverage against SLAs and KPIs we have committed to per site.</a:t>
             </a:r>
           </a:p>
         </p:txBody>
@@ -6161,7 +6156,7 @@
                 </a:solidFill>
                 <a:latin typeface="Calibri"/>
               </a:rPr>
-              <a:t>Annotate handles the ontology with attributes and frame classifications, native video and 3D point cloud labelling, SAM 3 auto-segmentation and object tracking with interpolation across a pass. Workflows give annotate, review and sampled review with routing, and Active label validation surfaces likely label errors. Agents can run a Dexory model as a pre-labelling or QA stage so humans only adjudicate the uncertain frames.</a:t>
+              <a:t>Active imports Dexory predictions and gives mAP/mAR/F1, PR curves and confusion matrix sliced by class, IoU threshold and any data metric; metric-to-failure correlation names the data slice to label next. Outputs can feed the Databricks layer via SDK.</a:t>
             </a:r>
           </a:p>
         </p:txBody>
@@ -6549,7 +6544,7 @@
                           </a:solidFill>
                           <a:latin typeface="Calibri"/>
                         </a:rPr>
-                        <a:t>3D cuboid</a:t>
+                        <a:t>bounding box</a:t>
                       </a:r>
                     </a:p>
                   </a:txBody>
@@ -6571,7 +6566,7 @@
                           </a:solidFill>
                           <a:latin typeface="Calibri"/>
                         </a:rPr>
-                        <a:t>Occupancy and overhang are geometric, and cuboids on the LIDAR sweep align presence with the WMS location rather than just a 2D box.</a:t>
+                        <a:t>Core unit for occupancy and WMS discrepancy checks</a:t>
                       </a:r>
                     </a:p>
                   </a:txBody>
@@ -6595,7 +6590,7 @@
                           </a:solidFill>
                           <a:latin typeface="Calibri"/>
                         </a:rPr>
-                        <a:t>Location label or placard</a:t>
+                        <a:t>Empty location</a:t>
                       </a:r>
                     </a:p>
                   </a:txBody>
@@ -6639,7 +6634,7 @@
                           </a:solidFill>
                           <a:latin typeface="Calibri"/>
                         </a:rPr>
-                        <a:t>The rack address is what ties every detection to a WMS location; box plus a decoded-string attribute supports OCR error analysis.</a:t>
+                        <a:t>Drives inventory accuracy and slotting or consolidation suggestions</a:t>
                       </a:r>
                     </a:p>
                   </a:txBody>
@@ -6663,7 +6658,7 @@
                           </a:solidFill>
                           <a:latin typeface="Calibri"/>
                         </a:rPr>
-                        <a:t>Damaged stock or wrapping breach</a:t>
+                        <a:t>Barcode or location placard</a:t>
                       </a:r>
                     </a:p>
                   </a:txBody>
@@ -6685,7 +6680,7 @@
                           </a:solidFill>
                           <a:latin typeface="Calibri"/>
                         </a:rPr>
-                        <a:t>bitmask</a:t>
+                        <a:t>polygon</a:t>
                       </a:r>
                     </a:p>
                   </a:txBody>
@@ -6707,7 +6702,7 @@
                           </a:solidFill>
                           <a:latin typeface="Calibri"/>
                         </a:rPr>
-                        <a:t>Damage is irregular and partial; a mask plus severity attribute supports the Storage Health alert threshold better than a box.</a:t>
+                        <a:t>Small, skewed text regions; box wastes pixels on angled labels</a:t>
                       </a:r>
                     </a:p>
                   </a:txBody>
@@ -6731,7 +6726,143 @@
                           </a:solidFill>
                           <a:latin typeface="Calibri"/>
                         </a:rPr>
-                        <a:t>Leaning pallet lean axis</a:t>
+                        <a:t>Damaged stock or packaging</a:t>
+                      </a:r>
+                    </a:p>
+                  </a:txBody>
+                  <a:tcPr>
+                    <a:solidFill>
+                      <a:srgbClr val="EEEDFB"/>
+                    </a:solidFill>
+                  </a:tcPr>
+                </a:tc>
+                <a:tc>
+                  <a:txBody>
+                    <a:bodyPr/>
+                    <a:lstStyle/>
+                    <a:p>
+                      <a:r>
+                        <a:rPr sz="1050" b="0">
+                          <a:solidFill>
+                            <a:srgbClr val="171A33"/>
+                          </a:solidFill>
+                          <a:latin typeface="Calibri"/>
+                        </a:rPr>
+                        <a:t>bitmask</a:t>
+                      </a:r>
+                    </a:p>
+                  </a:txBody>
+                  <a:tcPr>
+                    <a:solidFill>
+                      <a:srgbClr val="EEEDFB"/>
+                    </a:solidFill>
+                  </a:tcPr>
+                </a:tc>
+                <a:tc>
+                  <a:txBody>
+                    <a:bodyPr/>
+                    <a:lstStyle/>
+                    <a:p>
+                      <a:r>
+                        <a:rPr sz="1050" b="0">
+                          <a:solidFill>
+                            <a:srgbClr val="171A33"/>
+                          </a:solidFill>
+                          <a:latin typeface="Calibri"/>
+                        </a:rPr>
+                        <a:t>Damage is irregular; mask supports severity attributes for Integrity</a:t>
+                      </a:r>
+                    </a:p>
+                  </a:txBody>
+                  <a:tcPr>
+                    <a:solidFill>
+                      <a:srgbClr val="EEEDFB"/>
+                    </a:solidFill>
+                  </a:tcPr>
+                </a:tc>
+              </a:tr>
+              <a:tr h="365760">
+                <a:tc>
+                  <a:txBody>
+                    <a:bodyPr/>
+                    <a:lstStyle/>
+                    <a:p>
+                      <a:r>
+                        <a:rPr sz="1050" b="1">
+                          <a:solidFill>
+                            <a:srgbClr val="171A33"/>
+                          </a:solidFill>
+                          <a:latin typeface="Calibri"/>
+                        </a:rPr>
+                        <a:t>Leaning or overhanging pallet</a:t>
+                      </a:r>
+                    </a:p>
+                  </a:txBody>
+                  <a:tcPr>
+                    <a:solidFill>
+                      <a:srgbClr val="FFFFFF"/>
+                    </a:solidFill>
+                  </a:tcPr>
+                </a:tc>
+                <a:tc>
+                  <a:txBody>
+                    <a:bodyPr/>
+                    <a:lstStyle/>
+                    <a:p>
+                      <a:r>
+                        <a:rPr sz="1050" b="0">
+                          <a:solidFill>
+                            <a:srgbClr val="171A33"/>
+                          </a:solidFill>
+                          <a:latin typeface="Calibri"/>
+                        </a:rPr>
+                        <a:t>3D cuboid</a:t>
+                      </a:r>
+                    </a:p>
+                  </a:txBody>
+                  <a:tcPr>
+                    <a:solidFill>
+                      <a:srgbClr val="FFFFFF"/>
+                    </a:solidFill>
+                  </a:tcPr>
+                </a:tc>
+                <a:tc>
+                  <a:txBody>
+                    <a:bodyPr/>
+                    <a:lstStyle/>
+                    <a:p>
+                      <a:r>
+                        <a:rPr sz="1050" b="0">
+                          <a:solidFill>
+                            <a:srgbClr val="171A33"/>
+                          </a:solidFill>
+                          <a:latin typeface="Calibri"/>
+                        </a:rPr>
+                        <a:t>Lean and aisle intrusion need orientation, not an axis-aligned box</a:t>
+                      </a:r>
+                    </a:p>
+                  </a:txBody>
+                  <a:tcPr>
+                    <a:solidFill>
+                      <a:srgbClr val="FFFFFF"/>
+                    </a:solidFill>
+                  </a:tcPr>
+                </a:tc>
+              </a:tr>
+              <a:tr h="365760">
+                <a:tc>
+                  <a:txBody>
+                    <a:bodyPr/>
+                    <a:lstStyle/>
+                    <a:p>
+                      <a:r>
+                        <a:rPr sz="1050" b="1">
+                          <a:solidFill>
+                            <a:srgbClr val="171A33"/>
+                          </a:solidFill>
+                          <a:latin typeface="Calibri"/>
+                        </a:rPr>
+                        <a:t>Rack beam and upright</a:t>
                       </a:r>
                     </a:p>
                   </a:txBody>
@@ -6775,7 +6906,7 @@
                           </a:solidFill>
                           <a:latin typeface="Calibri"/>
                         </a:rPr>
-                        <a:t>Lean is an angle, not an area; annotating the load edge as a polyline lets you regress deflection and set a compliance threshold.</a:t>
+                        <a:t>Rack compliance and deflection checks follow long thin structures</a:t>
                       </a:r>
                     </a:p>
                   </a:txBody>
@@ -6799,7 +6930,7 @@
                           </a:solidFill>
                           <a:latin typeface="Calibri"/>
                         </a:rPr>
-                        <a:t>Rack beam or upright damage</a:t>
+                        <a:t>Aisle obstruction or debris</a:t>
                       </a:r>
                     </a:p>
                   </a:txBody>
@@ -6821,7 +6952,7 @@
                           </a:solidFill>
                           <a:latin typeface="Calibri"/>
                         </a:rPr>
-                        <a:t>keypoint</a:t>
+                        <a:t>polygon</a:t>
                       </a:r>
                     </a:p>
                   </a:txBody>
@@ -6843,7 +6974,7 @@
                           </a:solidFill>
                           <a:latin typeface="Calibri"/>
                         </a:rPr>
-                        <a:t>Rack compliance inspections care about the specific deformation point on a beam or upright, which keypoints capture cheaply and consistently.</a:t>
+                        <a:t>Job ad names obstructions as an SLA signal; shapes vary widely</a:t>
                       </a:r>
                     </a:p>
                   </a:txBody>
@@ -6867,143 +6998,7 @@
                           </a:solidFill>
                           <a:latin typeface="Calibri"/>
                         </a:rPr>
-                        <a:t>Aisle obstruction</a:t>
-                      </a:r>
-                    </a:p>
-                  </a:txBody>
-                  <a:tcPr>
-                    <a:solidFill>
-                      <a:srgbClr val="EEEDFB"/>
-                    </a:solidFill>
-                  </a:tcPr>
-                </a:tc>
-                <a:tc>
-                  <a:txBody>
-                    <a:bodyPr/>
-                    <a:lstStyle/>
-                    <a:p>
-                      <a:r>
-                        <a:rPr sz="1050" b="0">
-                          <a:solidFill>
-                            <a:srgbClr val="171A33"/>
-                          </a:solidFill>
-                          <a:latin typeface="Calibri"/>
-                        </a:rPr>
-                        <a:t>polygon</a:t>
-                      </a:r>
-                    </a:p>
-                  </a:txBody>
-                  <a:tcPr>
-                    <a:solidFill>
-                      <a:srgbClr val="EEEDFB"/>
-                    </a:solidFill>
-                  </a:tcPr>
-                </a:tc>
-                <a:tc>
-                  <a:txBody>
-                    <a:bodyPr/>
-                    <a:lstStyle/>
-                    <a:p>
-                      <a:r>
-                        <a:rPr sz="1050" b="0">
-                          <a:solidFill>
-                            <a:srgbClr val="171A33"/>
-                          </a:solidFill>
-                          <a:latin typeface="Calibri"/>
-                        </a:rPr>
-                        <a:t>The job ad names obstructions as an operational signal; polygons handle stray pallets, cages and people blocking a scan pass.</a:t>
-                      </a:r>
-                    </a:p>
-                  </a:txBody>
-                  <a:tcPr>
-                    <a:solidFill>
-                      <a:srgbClr val="EEEDFB"/>
-                    </a:solidFill>
-                  </a:tcPr>
-                </a:tc>
-              </a:tr>
-              <a:tr h="365760">
-                <a:tc>
-                  <a:txBody>
-                    <a:bodyPr/>
-                    <a:lstStyle/>
-                    <a:p>
-                      <a:r>
-                        <a:rPr sz="1050" b="1">
-                          <a:solidFill>
-                            <a:srgbClr val="171A33"/>
-                          </a:solidFill>
-                          <a:latin typeface="Calibri"/>
-                        </a:rPr>
-                        <a:t>Empty or blocked location</a:t>
-                      </a:r>
-                    </a:p>
-                  </a:txBody>
-                  <a:tcPr>
-                    <a:solidFill>
-                      <a:srgbClr val="FFFFFF"/>
-                    </a:solidFill>
-                  </a:tcPr>
-                </a:tc>
-                <a:tc>
-                  <a:txBody>
-                    <a:bodyPr/>
-                    <a:lstStyle/>
-                    <a:p>
-                      <a:r>
-                        <a:rPr sz="1050" b="0">
-                          <a:solidFill>
-                            <a:srgbClr val="171A33"/>
-                          </a:solidFill>
-                          <a:latin typeface="Calibri"/>
-                        </a:rPr>
-                        <a:t>frame classification</a:t>
-                      </a:r>
-                    </a:p>
-                  </a:txBody>
-                  <a:tcPr>
-                    <a:solidFill>
-                      <a:srgbClr val="FFFFFF"/>
-                    </a:solidFill>
-                  </a:tcPr>
-                </a:tc>
-                <a:tc>
-                  <a:txBody>
-                    <a:bodyPr/>
-                    <a:lstStyle/>
-                    <a:p>
-                      <a:r>
-                        <a:rPr sz="1050" b="0">
-                          <a:solidFill>
-                            <a:srgbClr val="171A33"/>
-                          </a:solidFill>
-                          <a:latin typeface="Calibri"/>
-                        </a:rPr>
-                        <a:t>Cheap per-frame truth for the presence model and for scan coverage reporting, no geometry needed.</a:t>
-                      </a:r>
-                    </a:p>
-                  </a:txBody>
-                  <a:tcPr>
-                    <a:solidFill>
-                      <a:srgbClr val="FFFFFF"/>
-                    </a:solidFill>
-                  </a:tcPr>
-                </a:tc>
-              </a:tr>
-              <a:tr h="365760">
-                <a:tc>
-                  <a:txBody>
-                    <a:bodyPr/>
-                    <a:lstStyle/>
-                    <a:p>
-                      <a:r>
-                        <a:rPr sz="1050" b="1">
-                          <a:solidFill>
-                            <a:srgbClr val="171A33"/>
-                          </a:solidFill>
-                          <a:latin typeface="Calibri"/>
-                        </a:rPr>
-                        <a:t>Scan condition</a:t>
+                        <a:t>Scan quality flag (blur, low light, occluded)</a:t>
                       </a:r>
                     </a:p>
                   </a:txBody>
@@ -7047,7 +7042,7 @@
                           </a:solidFill>
                           <a:latin typeface="Calibri"/>
                         </a:rPr>
-                        <a:t>Glare, motion blur, low light and wrapped-film reflection explain most false negatives; tagging them lets Active correlate failure with condition.</a:t>
+                        <a:t>Lets Active slice accuracy by condition and gates curation</a:t>
                       </a:r>
                     </a:p>
                   </a:txBody>
@@ -7929,7 +7924,7 @@
                 </a:solidFill>
                 <a:latin typeface="Calibri"/>
               </a:rPr>
-              <a:t>Automotus</a:t>
+              <a:t>Automotus, plus Encord's own warehouse-robot curation benchmark</a:t>
             </a:r>
           </a:p>
         </p:txBody>
@@ -7968,7 +7963,7 @@
                 </a:solidFill>
                 <a:latin typeface="Calibri"/>
               </a:rPr>
-              <a:t>+20 percent mAP, 35 percent smaller dataset, 33 percent lower labelling cost after curating with Encord.</a:t>
+              <a:t>Automotus: +20% mAP, 35% smaller dataset, 33% lower labelling cost. Warehouse-robot benchmark: 61% fewer frames to label keeping 95% of racks, YOLOv8n 0.48 vs 0.43 mAP50 against a random pick of equal size.</a:t>
             </a:r>
           </a:p>
         </p:txBody>
@@ -8007,7 +8002,7 @@
                 </a:solidFill>
                 <a:latin typeface="Calibri"/>
               </a:rPr>
-              <a:t>Automotus runs fixed street cameras producing huge volumes of highly repetitive footage of the same scenes, which is structurally the same curation problem as a robot re-scanning the same rack face daily. They solved it by curating rather than labelling more.</a:t>
+              <a:t>Automotus runs fixed street cameras producing huge volumes of highly repetitive frames, the same redundancy problem as daily rack scans; curation, not more labels, moved accuracy. Our internal shelf-image benchmark is the closest direct analogue to Dexory's aisle passes.</a:t>
             </a:r>
           </a:p>
         </p:txBody>
@@ -8386,7 +8381,7 @@
                 </a:solidFill>
                 <a:latin typeface="Calibri"/>
               </a:rPr>
-              <a:t>Week 1, day 1 to 2: register one site's last four weeks of scans in Index directly from the Dexory bucket (data never moves), generate embeddings and quality metrics, and agree the Storage Health ontology with the perception lead.</a:t>
+              <a:t>Week 0: register one site's recent scans from Dexory's existing S3/GCS bucket in Index (data never moves), agree the slice: one or two sites, one or two weeks of scans, plus the current Storage Health class list.</a:t>
             </a:r>
           </a:p>
         </p:txBody>
@@ -8508,7 +8503,7 @@
                 </a:solidFill>
                 <a:latin typeface="Calibri"/>
               </a:rPr>
-              <a:t>Week 1, day 3 to 5: de-duplicate passes with similarity search and build two Collections, a diverse baseline and a rare-event set for damaged stock and leaning pallets. Success metric: at least 50 percent fewer frames proposed for labelling versus the current selection for the same rack coverage.</a:t>
+              <a:t>Week 1: generate embeddings and quality metrics, de-duplicate the repeat aisle passes and build two equal-sized Collections, curated versus random. Success metric: percentage reduction in frames needed to retain agreed rack or location coverage.</a:t>
             </a:r>
           </a:p>
         </p:txBody>
@@ -8630,7 +8625,7 @@
                 </a:solidFill>
                 <a:latin typeface="Calibri"/>
               </a:rPr>
-              <a:t>Week 2, day 1 to 3: label the curated set in Annotate with SAM 3 and tracking across the pass, with a sampled review stage. Success metric: time per frame for damage masks versus the current tool, and reviewer disagreement rate under an agreed threshold.</a:t>
+              <a:t>Week 1: import existing predictions for pallet, empty location and one Integrity class into Active; produce confusion matrix and accuracy sliced by blur, brightness and obstruction per site. Success metric: at least three named failure slices Dexory did not have visibility on.</a:t>
             </a:r>
           </a:p>
         </p:txBody>
@@ -8752,7 +8747,7 @@
                 </a:solidFill>
                 <a:latin typeface="Calibri"/>
               </a:rPr>
-              <a:t>Week 2, day 3 to 4: import Dexory's current Storage Health predictions into Active, produce mAP, F1 and confusion matrix sliced by site, class and scan condition, and run label validation over an existing labelled batch. Success metric: a named list of the top three failure slices and any label errors found in data they believed was clean.</a:t>
+              <a:t>Week 2: label the curated Collection in Annotate with the agreed ontology, using SAM 3 and tracking, and run an Agents pre-label stage on the damage class. Success metric: minutes per frame versus current baseline, plus reviewer agreement on the new classes.</a:t>
             </a:r>
           </a:p>
         </p:txBody>
@@ -8874,7 +8869,7 @@
                 </a:solidFill>
                 <a:latin typeface="Calibri"/>
               </a:rPr>
-              <a:t>Week 2, day 5: retrain or fine-tune on the curated set versus a random set of equal size and compare. Success metric: mAP uplift on a held-out set plus an agreed SDK export path into the Databricks layer so results feed the SLA reporting the new data hire is building.</a:t>
+              <a:t>Week 2: retrain or fine-tune on curated versus random picks of equal size and compare in Active. Success metric: mAP or F1 delta on a held-out site, and a cost-per-usable-label figure to take to the CFO.</a:t>
             </a:r>
           </a:p>
         </p:txBody>
@@ -9131,7 +9126,7 @@
                 </a:solidFill>
                 <a:latin typeface="Calibri"/>
               </a:rPr>
-              <a:t>•  When Storage Health flags a damaged pallet wrongly at a customer site, how do you trace that back to training data today, and how long does the loop take?</a:t>
+              <a:t>•  When you added the Storage Health classes, how many frames did you label to get the first usable model, and how did you choose those frames out of the daily scans?</a:t>
             </a:r>
           </a:p>
           <a:p>
@@ -9147,7 +9142,7 @@
                 </a:solidFill>
                 <a:latin typeface="Calibri"/>
               </a:rPr>
-              <a:t>•  How do you currently decide which of the millions of scan frames get labelled, and who does the labelling?</a:t>
+              <a:t>•  Across a week of scans at one site, what proportion do you actually keep for training, and what decides that today?</a:t>
             </a:r>
           </a:p>
           <a:p>
@@ -9163,7 +9158,7 @@
                 </a:solidFill>
                 <a:latin typeface="Calibri"/>
               </a:rPr>
-              <a:t>•  The Senior Data Engineer ad talks about modelling perception accuracy per site against SLAs. Is that number produced today, and is it something perception can slice by class and scan condition or only in aggregate?</a:t>
+              <a:t>•  When a site misses its perception accuracy SLA, how long does it take to find out whether it is lighting, blur, obstruction, rack type or a genuine model gap?</a:t>
             </a:r>
           </a:p>
           <a:p>
@@ -9179,7 +9174,7 @@
                 </a:solidFill>
                 <a:latin typeface="Calibri"/>
               </a:rPr>
-              <a:t>•  For the new classes, are you labelling on 2D camera frames, on the LIDAR point cloud, or both, and does the same object need to be consistent across them?</a:t>
+              <a:t>•  Who labels today: internal ops reviewers, an outsourced vendor, or a tool your team built, and what is the per-class cost of that?</a:t>
             </a:r>
           </a:p>
           <a:p>
@@ -9195,7 +9190,7 @@
                 </a:solidFill>
                 <a:latin typeface="Calibri"/>
               </a:rPr>
-              <a:t>•  What is in place already for annotation and evaluation, is it internal tooling, an outsourced vendor, or open source, and what would have to be true for you to change it?</a:t>
+              <a:t>•  The Senior Data Engineer ad mentions modelling perception accuracy against per-site SLAs in Databricks. Is that metric currently produced by the perception team by hand?</a:t>
             </a:r>
           </a:p>
         </p:txBody>

--- a/docs/briefs/dexory.pptx
+++ b/docs/briefs/dexory.pptx
@@ -513,27 +513,27 @@
           </a:p>
           <a:p>
             <a:r>
-              <a:t>- When you added the Storage Health classes, how many frames did you label to get the first usable model, and how did you choose those frames out of the daily scans?</a:t>
-            </a:r>
-          </a:p>
-          <a:p>
-            <a:r>
-              <a:t>- Across a week of scans at one site, what proportion do you actually keep for training, and what decides that today?</a:t>
-            </a:r>
-          </a:p>
-          <a:p>
-            <a:r>
-              <a:t>- When a site misses its perception accuracy SLA, how long does it take to find out whether it is lighting, blur, obstruction, rack type or a genuine model gap?</a:t>
-            </a:r>
-          </a:p>
-          <a:p>
-            <a:r>
-              <a:t>- Who labels today: internal ops reviewers, an outsourced vendor, or a tool your team built, and what is the per-class cost of that?</a:t>
-            </a:r>
-          </a:p>
-          <a:p>
-            <a:r>
-              <a:t>- The Senior Data Engineer ad mentions modelling perception accuracy against per-site SLAs in Databricks. Is that metric currently produced by the perception team by hand?</a:t>
+              <a:t>- How is perception accuracy defined and measured per site today, and who is accountable when a site drifts below the committed SLA?</a:t>
+            </a:r>
+          </a:p>
+          <a:p>
+            <a:r>
+              <a:t>- When you launched the new Integrity classes for damage and rack compliance, how many frames did you label and how long did it take from decision to deployed model?</a:t>
+            </a:r>
+          </a:p>
+          <a:p>
+            <a:r>
+              <a:t>- Of the frames a robot captures in a daily scan, roughly what fraction ever reaches an annotator, and how do you choose them?</a:t>
+            </a:r>
+          </a:p>
+          <a:p>
+            <a:r>
+              <a:t>- What happens operationally when a customer disputes a discrepancy flag: does that frame get back into the training set, and can you find similar frames across other sites?</a:t>
+            </a:r>
+          </a:p>
+          <a:p>
+            <a:r>
+              <a:t>- Can customer imagery from Iron Mountain or Stellantis sites leave your own cloud storage, and what does that rule out tool-wise?</a:t>
             </a:r>
           </a:p>
         </p:txBody>
@@ -613,22 +613,22 @@
           </a:p>
           <a:p>
             <a:r>
-              <a:t>- Strong build instinct: they are hiring a founding data engineer on Databricks and may treat curation and evaluation as internal platform work rather than a bought tool.</a:t>
-            </a:r>
-          </a:p>
-          <a:p>
-            <a:r>
-              <a:t>- The evidence is about business and SLA data, not labelling pain; no perception or annotation job ad, so the hypotheses are inferred rather than observed.</a:t>
-            </a:r>
-          </a:p>
-          <a:p>
-            <a:r>
-              <a:t>- Data access and security review: customer warehouse imagery under contract, so expect SOC2, GDPR and per-customer consent hurdles before a POV on real scans.</a:t>
-            </a:r>
-          </a:p>
-          <a:p>
-            <a:r>
-              <a:t>- Cost discipline signals (CFO profile, subscription model, ROI calculator) mean any tool spend must map to labelling cost per site, and a cheaper incumbent (Roboflow, V7, a BPO with its own tool) may be good enough.</a:t>
+              <a:t>- The visible hire is a Founding Data Engineer focused on business and SLA reporting in Databricks, not a perception data lead; our persona may not be hiring or budgeted right now.</a:t>
+            </a:r>
+          </a:p>
+          <a:p>
+            <a:r>
+              <a:t>- Likely in-house annotation tooling built over several years alongside the robot stack, with sunk cost and an internal argument that shelf scans are simple enough to label cheaply offshore.</a:t>
+            </a:r>
+          </a:p>
+          <a:p>
+            <a:r>
+              <a:t>- Enterprise customer imagery from logistics and automotive sites may carry contractual restrictions that slow any third-party tool through security review, even with data staying in their bucket.</a:t>
+            </a:r>
+          </a:p>
+          <a:p>
+            <a:r>
+              <a:t>- Incumbent vendor or open-source stack (CVAT, Roboflow, a managed labelling BPO) already covers basic box labelling, so our wedge has to be curation and model evaluation, not labelling price.</a:t>
             </a:r>
           </a:p>
         </p:txBody>
@@ -3795,7 +3795,7 @@
                 </a:solidFill>
                 <a:latin typeface="Calibri"/>
               </a:rPr>
-              <a:t>Prepared 2026-09-28</a:t>
+              <a:t>Prepared 2026-10-05</a:t>
             </a:r>
           </a:p>
           <a:p>
@@ -3905,7 +3905,7 @@
                 </a:solidFill>
                 <a:latin typeface="Calibri"/>
               </a:rPr>
-              <a:t>Dexory's cost of adding a new Integrity class scales with the number of daily scans rather than with what the model actually learns, and curation plus per-site model evaluation is where that breaks.</a:t>
+              <a:t>Dexory now sells perception accuracy as a contracted SLA per site, so the bottleneck is no longer collecting shelf scans but choosing which of the millions of near-identical frames to label and proving the Integrity models hold up site by site.</a:t>
             </a:r>
           </a:p>
         </p:txBody>
@@ -4201,7 +4201,7 @@
                 </a:solidFill>
                 <a:latin typeface="Calibri"/>
               </a:rPr>
-              <a:t>Autonomous scanning robots drive warehouse aisles daily and turn scan data into DexoryView: real-time inventory accuracy, plus Integrity (inventory discrepancies, hygiene or damage risks, rack compliance) and Optimise (slotting, space utilisation, consolidation). Buyers are 3PLs and manufacturers such as Ziegler, Romark Logistics, Seac and Stellantis, on a monthly per-site subscription, roughly $28.6m est. ARR.</a:t>
+              <a:t>Dexory builds autonomous camera and sensor robots (now up to 18m AMRs) that drive warehouse aisles daily and feed DexoryView, a subscription platform that reconciles what the WMS says should be in a location against what is actually there. The Integrity module flags inventory discrepancies, damage and hygiene risks and rack compliance; Optimise handles slotting and space utilisation. Buyers are 3PL and enterprise logistics operators such as Iron Mountain, Ziegler, Romark and Stellantis sites.</a:t>
             </a:r>
           </a:p>
         </p:txBody>
@@ -4362,7 +4362,7 @@
                 </a:solidFill>
                 <a:latin typeface="Calibri"/>
               </a:rPr>
-              <a:t>Robot runs a scheduled mission per aisle, capturing camera imagery plus LIDAR and barcode or RFID reads with pose and location metadata (mission scheduling confirmed by site; sensor mix is our guess).</a:t>
+              <a:t>Robots run automated daily scan missions per aisle, capturing high-resolution imagery of every rack face plus (guess) LIDAR or depth for localisation and pallet geometry.</a:t>
             </a:r>
           </a:p>
         </p:txBody>
@@ -4484,7 +4484,7 @@
                 </a:solidFill>
                 <a:latin typeface="Calibri"/>
               </a:rPr>
-              <a:t>Scans upload to cloud object storage and are keyed to site, aisle, rack and location; volumes are millions of near-identical shelf frames per site per week (our guess on scale).</a:t>
+              <a:t>Scans are uploaded per site and per mission into cloud object storage, probably partitioned by customer, site, date and mission, with barcode or location-label reads tied to WMS slot IDs (guess).</a:t>
             </a:r>
           </a:p>
         </p:txBody>
@@ -4606,7 +4606,7 @@
                 </a:solidFill>
                 <a:latin typeface="Calibri"/>
               </a:rPr>
-              <a:t>Perception models read location contents, barcodes and empties, and Integrity models flag damage, hygiene and rack compliance; discrepancies are reconciled against the customer's WMS.</a:t>
+              <a:t>Detection and OCR models produce occupancy, location ID and discrepancy outputs; newer Integrity classes (damage, hygiene, rack compliance) run on top of the same frames (guess).</a:t>
             </a:r>
           </a:p>
         </p:txBody>
@@ -4728,7 +4728,7 @@
                 </a:solidFill>
                 <a:latin typeface="Calibri"/>
               </a:rPr>
-              <a:t>Labelling for new classes such as damaged stock or leaning pallets is likely a mix of internal review and an outsourced or managed workforce, driven by whatever frames look interesting (guess).</a:t>
+              <a:t>Labelling is likely a mix of in-house tooling, an outsourced vendor and operations staff adjudicating flagged exceptions; we have no direct evidence of the tool used.</a:t>
             </a:r>
           </a:p>
         </p:txBody>
@@ -4850,7 +4850,7 @@
                 </a:solidFill>
                 <a:latin typeface="Calibri"/>
               </a:rPr>
-              <a:t>Operational and perception signals land in a lakehouse: the Senior Data Engineer ad names Databricks, perception accuracy, scan and mission performance, obstructions and scan coverage against per-site SLAs.</a:t>
+              <a:t>Model outputs are aggregated into per-site accuracy, scan coverage and obstruction metrics; the Founding Data Engineer ad says these are being modelled against committed SLAs and KPIs in Databricks.</a:t>
             </a:r>
           </a:p>
         </p:txBody>
@@ -4972,7 +4972,7 @@
                 </a:solidFill>
                 <a:latin typeface="Calibri"/>
               </a:rPr>
-              <a:t>Model performance is reported per site in dashboards; failure analysis by scene condition or class slice is probably manual (guess).</a:t>
+              <a:t>Failures surface as customer-reported discrepancies, which (guess) are fed back manually as new training examples with no systematic way to find similar frames across sites.</a:t>
             </a:r>
           </a:p>
         </p:txBody>
@@ -5356,7 +5356,7 @@
                 </a:solidFill>
                 <a:latin typeface="Calibri"/>
               </a:rPr>
-              <a:t>Daily repeat scans of the same racking mean labelling budget buys mostly duplicates, so cost grows with fleet and site count instead of with model accuracy.</a:t>
+              <a:t>Massive redundancy: the same rack face is scanned daily, so labelling budget is spent on near-duplicate frames while rare damage and compliance events stay under-represented.</a:t>
             </a:r>
           </a:p>
         </p:txBody>
@@ -5434,7 +5434,7 @@
                 </a:solidFill>
                 <a:latin typeface="Calibri"/>
               </a:rPr>
-              <a:t>Site text: automated daily scans, scale across multiple sites without disruption; our note on millions of near-identical shelf images per site per week.</a:t>
+              <a:t>Daily automated scans across multi-site deployments (Iron Mountain expansion, Stellantis), plus new Integrity classes for damage, hygiene and rack compliance.</a:t>
             </a:r>
           </a:p>
         </p:txBody>
@@ -5512,7 +5512,7 @@
                 </a:solidFill>
                 <a:latin typeface="Calibri"/>
               </a:rPr>
-              <a:t>Index registers the frames in Dexory's own bucket, computes embeddings and per-frame metrics (sharpness, brightness, uniqueness), then similarity search and diversity sampling build a Collection to label. Our warehouse-robot benchmark cut frames to label by 61% keeping 95% of racks.</a:t>
+              <a:t>Index registers frames in their own bucket, computes embeddings and quality metrics, and lets them de-duplicate and diversity-sample into Collections. Our warehouse shelf-scan benchmark cut frames to label by 61% while keeping 95% of racks, and the curated pick beat a random pick of equal size.</a:t>
             </a:r>
           </a:p>
         </p:txBody>
@@ -5678,7 +5678,7 @@
                 </a:solidFill>
                 <a:latin typeface="Calibri"/>
               </a:rPr>
-              <a:t>New Integrity classes like damaged stock, leaning pallets and hygiene risks are rare, subjective and expensive to bootstrap, so early label quality and class definitions drift between annotators.</a:t>
+              <a:t>Perception accuracy is now a contractual SLA per site, but there is no systematic way to show where models fail by site, aisle, lighting or class.</a:t>
             </a:r>
           </a:p>
         </p:txBody>
@@ -5756,7 +5756,7 @@
                 </a:solidFill>
                 <a:latin typeface="Calibri"/>
               </a:rPr>
-              <a:t>Storage Health launched Feb 2026; site text lists damage risks and rack compliance under the Integrity module as ML-flagged outputs.</a:t>
+              <a:t>Job ad: model perception accuracy, scan and mission performance, obstructions and scan coverage against SLAs and KPIs committed per site.</a:t>
             </a:r>
           </a:p>
         </p:txBody>
@@ -5834,7 +5834,7 @@
                 </a:solidFill>
                 <a:latin typeface="Calibri"/>
               </a:rPr>
-              <a:t>Annotate ontology with objects plus attributes pins the definition of damaged versus leaning versus non-compliant; SAM 3 and object tracking across video speed up masks; Agents run a Dexory model or foundation model as a pre-label stage; Active finds label errors.</a:t>
+              <a:t>Active imports their predictions and reports mAP, F1, PR curves and confusion matrix sliced by class, IoU threshold and any data metric. Metric-to-failure correlation then tells them which frames to label next, feeding the per-site SLA story directly.</a:t>
             </a:r>
           </a:p>
         </p:txBody>
@@ -6000,7 +6000,7 @@
                 </a:solidFill>
                 <a:latin typeface="Calibri"/>
               </a:rPr>
-              <a:t>Per-site perception accuracy is reported but not diagnosable: no easy way to see which conditions (blur, low light, obstruction, rack type) drive misses, or what to label next.</a:t>
+              <a:t>New Integrity classes (damage, leaning pallets, hygiene risks) need fresh labels fast, and each new enterprise site brings new racking, lighting and pallet types that break the previous ontology.</a:t>
             </a:r>
           </a:p>
         </p:txBody>
@@ -6078,7 +6078,7 @@
                 </a:solidFill>
                 <a:latin typeface="Calibri"/>
               </a:rPr>
-              <a:t>Job ad: model perception accuracy, scan and mission performance, obstructions and scan coverage against SLAs and KPIs we have committed to per site.</a:t>
+              <a:t>Site text on Integrity module ML models; Storage Health launch Feb 2026; rapid multi-site expansion with Iron Mountain and Stellantis.</a:t>
             </a:r>
           </a:p>
         </p:txBody>
@@ -6156,7 +6156,7 @@
                 </a:solidFill>
                 <a:latin typeface="Calibri"/>
               </a:rPr>
-              <a:t>Active imports Dexory predictions and gives mAP/mAR/F1, PR curves and confusion matrix sliced by class, IoU threshold and any data metric; metric-to-failure correlation names the data slice to label next. Outputs can feed the Databricks layer via SDK.</a:t>
+              <a:t>Annotate gives one ontology across images, native video and point clouds with SAM 3 auto-segmentation, tracking and interpolation, plus review workflows. Agents run their own detector as a pre-labelling stage so annotators correct rather than draw.</a:t>
             </a:r>
           </a:p>
         </p:txBody>
@@ -6566,7 +6566,7 @@
                           </a:solidFill>
                           <a:latin typeface="Calibri"/>
                         </a:rPr>
-                        <a:t>Core unit for occupancy and WMS discrepancy checks</a:t>
+                        <a:t>Core occupancy signal reconciled against the WMS slot record</a:t>
                       </a:r>
                     </a:p>
                   </a:txBody>
@@ -6590,7 +6590,7 @@
                           </a:solidFill>
                           <a:latin typeface="Calibri"/>
                         </a:rPr>
-                        <a:t>Empty location</a:t>
+                        <a:t>Empty or partially filled location</a:t>
                       </a:r>
                     </a:p>
                   </a:txBody>
@@ -6634,7 +6634,7 @@
                           </a:solidFill>
                           <a:latin typeface="Calibri"/>
                         </a:rPr>
-                        <a:t>Drives inventory accuracy and slotting or consolidation suggestions</a:t>
+                        <a:t>Drives inventory discrepancy and space utilisation outputs</a:t>
                       </a:r>
                     </a:p>
                   </a:txBody>
@@ -6658,7 +6658,7 @@
                           </a:solidFill>
                           <a:latin typeface="Calibri"/>
                         </a:rPr>
-                        <a:t>Barcode or location placard</a:t>
+                        <a:t>Location or product barcode region</a:t>
                       </a:r>
                     </a:p>
                   </a:txBody>
@@ -6680,7 +6680,7 @@
                           </a:solidFill>
                           <a:latin typeface="Calibri"/>
                         </a:rPr>
-                        <a:t>polygon</a:t>
+                        <a:t>bounding box</a:t>
                       </a:r>
                     </a:p>
                   </a:txBody>
@@ -6702,7 +6702,7 @@
                           </a:solidFill>
                           <a:latin typeface="Calibri"/>
                         </a:rPr>
-                        <a:t>Small, skewed text regions; box wastes pixels on angled labels</a:t>
+                        <a:t>OCR region tying each detection to a WMS location ID</a:t>
                       </a:r>
                     </a:p>
                   </a:txBody>
@@ -6726,7 +6726,143 @@
                           </a:solidFill>
                           <a:latin typeface="Calibri"/>
                         </a:rPr>
-                        <a:t>Damaged stock or packaging</a:t>
+                        <a:t>Damaged rack beam or upright</a:t>
+                      </a:r>
+                    </a:p>
+                  </a:txBody>
+                  <a:tcPr>
+                    <a:solidFill>
+                      <a:srgbClr val="EEEDFB"/>
+                    </a:solidFill>
+                  </a:tcPr>
+                </a:tc>
+                <a:tc>
+                  <a:txBody>
+                    <a:bodyPr/>
+                    <a:lstStyle/>
+                    <a:p>
+                      <a:r>
+                        <a:rPr sz="1050" b="0">
+                          <a:solidFill>
+                            <a:srgbClr val="171A33"/>
+                          </a:solidFill>
+                          <a:latin typeface="Calibri"/>
+                        </a:rPr>
+                        <a:t>polygon</a:t>
+                      </a:r>
+                    </a:p>
+                  </a:txBody>
+                  <a:tcPr>
+                    <a:solidFill>
+                      <a:srgbClr val="EEEDFB"/>
+                    </a:solidFill>
+                  </a:tcPr>
+                </a:tc>
+                <a:tc>
+                  <a:txBody>
+                    <a:bodyPr/>
+                    <a:lstStyle/>
+                    <a:p>
+                      <a:r>
+                        <a:rPr sz="1050" b="0">
+                          <a:solidFill>
+                            <a:srgbClr val="171A33"/>
+                          </a:solidFill>
+                          <a:latin typeface="Calibri"/>
+                        </a:rPr>
+                        <a:t>Rack compliance and safety flags need tight shape, not loose boxes</a:t>
+                      </a:r>
+                    </a:p>
+                  </a:txBody>
+                  <a:tcPr>
+                    <a:solidFill>
+                      <a:srgbClr val="EEEDFB"/>
+                    </a:solidFill>
+                  </a:tcPr>
+                </a:tc>
+              </a:tr>
+              <a:tr h="365760">
+                <a:tc>
+                  <a:txBody>
+                    <a:bodyPr/>
+                    <a:lstStyle/>
+                    <a:p>
+                      <a:r>
+                        <a:rPr sz="1050" b="1">
+                          <a:solidFill>
+                            <a:srgbClr val="171A33"/>
+                          </a:solidFill>
+                          <a:latin typeface="Calibri"/>
+                        </a:rPr>
+                        <a:t>Leaning or overhanging pallet corners</a:t>
+                      </a:r>
+                    </a:p>
+                  </a:txBody>
+                  <a:tcPr>
+                    <a:solidFill>
+                      <a:srgbClr val="FFFFFF"/>
+                    </a:solidFill>
+                  </a:tcPr>
+                </a:tc>
+                <a:tc>
+                  <a:txBody>
+                    <a:bodyPr/>
+                    <a:lstStyle/>
+                    <a:p>
+                      <a:r>
+                        <a:rPr sz="1050" b="0">
+                          <a:solidFill>
+                            <a:srgbClr val="171A33"/>
+                          </a:solidFill>
+                          <a:latin typeface="Calibri"/>
+                        </a:rPr>
+                        <a:t>keypoint</a:t>
+                      </a:r>
+                    </a:p>
+                  </a:txBody>
+                  <a:tcPr>
+                    <a:solidFill>
+                      <a:srgbClr val="FFFFFF"/>
+                    </a:solidFill>
+                  </a:tcPr>
+                </a:tc>
+                <a:tc>
+                  <a:txBody>
+                    <a:bodyPr/>
+                    <a:lstStyle/>
+                    <a:p>
+                      <a:r>
+                        <a:rPr sz="1050" b="0">
+                          <a:solidFill>
+                            <a:srgbClr val="171A33"/>
+                          </a:solidFill>
+                          <a:latin typeface="Calibri"/>
+                        </a:rPr>
+                        <a:t>Lean and overhang angle is geometric, keypoints measure it directly</a:t>
+                      </a:r>
+                    </a:p>
+                  </a:txBody>
+                  <a:tcPr>
+                    <a:solidFill>
+                      <a:srgbClr val="FFFFFF"/>
+                    </a:solidFill>
+                  </a:tcPr>
+                </a:tc>
+              </a:tr>
+              <a:tr h="365760">
+                <a:tc>
+                  <a:txBody>
+                    <a:bodyPr/>
+                    <a:lstStyle/>
+                    <a:p>
+                      <a:r>
+                        <a:rPr sz="1050" b="1">
+                          <a:solidFill>
+                            <a:srgbClr val="171A33"/>
+                          </a:solidFill>
+                          <a:latin typeface="Calibri"/>
+                        </a:rPr>
+                        <a:t>Damaged or spilled stock, shrink wrap tear</a:t>
                       </a:r>
                     </a:p>
                   </a:txBody>
@@ -6770,7 +6906,7 @@
                           </a:solidFill>
                           <a:latin typeface="Calibri"/>
                         </a:rPr>
-                        <a:t>Damage is irregular; mask supports severity attributes for Integrity</a:t>
+                        <a:t>Irregular damage extent for Integrity damage and hygiene risk</a:t>
                       </a:r>
                     </a:p>
                   </a:txBody>
@@ -6794,7 +6930,7 @@
                           </a:solidFill>
                           <a:latin typeface="Calibri"/>
                         </a:rPr>
-                        <a:t>Leaning or overhanging pallet</a:t>
+                        <a:t>Aisle obstruction: debris, forklift, person</a:t>
                       </a:r>
                     </a:p>
                   </a:txBody>
@@ -6838,7 +6974,7 @@
                           </a:solidFill>
                           <a:latin typeface="Calibri"/>
                         </a:rPr>
-                        <a:t>Lean and aisle intrusion need orientation, not an axis-aligned box</a:t>
+                        <a:t>If LIDAR is used, obstruction and scan coverage metrics need 3D extent</a:t>
                       </a:r>
                     </a:p>
                   </a:txBody>
@@ -6862,143 +6998,7 @@
                           </a:solidFill>
                           <a:latin typeface="Calibri"/>
                         </a:rPr>
-                        <a:t>Rack beam and upright</a:t>
-                      </a:r>
-                    </a:p>
-                  </a:txBody>
-                  <a:tcPr>
-                    <a:solidFill>
-                      <a:srgbClr val="EEEDFB"/>
-                    </a:solidFill>
-                  </a:tcPr>
-                </a:tc>
-                <a:tc>
-                  <a:txBody>
-                    <a:bodyPr/>
-                    <a:lstStyle/>
-                    <a:p>
-                      <a:r>
-                        <a:rPr sz="1050" b="0">
-                          <a:solidFill>
-                            <a:srgbClr val="171A33"/>
-                          </a:solidFill>
-                          <a:latin typeface="Calibri"/>
-                        </a:rPr>
-                        <a:t>polyline</a:t>
-                      </a:r>
-                    </a:p>
-                  </a:txBody>
-                  <a:tcPr>
-                    <a:solidFill>
-                      <a:srgbClr val="EEEDFB"/>
-                    </a:solidFill>
-                  </a:tcPr>
-                </a:tc>
-                <a:tc>
-                  <a:txBody>
-                    <a:bodyPr/>
-                    <a:lstStyle/>
-                    <a:p>
-                      <a:r>
-                        <a:rPr sz="1050" b="0">
-                          <a:solidFill>
-                            <a:srgbClr val="171A33"/>
-                          </a:solidFill>
-                          <a:latin typeface="Calibri"/>
-                        </a:rPr>
-                        <a:t>Rack compliance and deflection checks follow long thin structures</a:t>
-                      </a:r>
-                    </a:p>
-                  </a:txBody>
-                  <a:tcPr>
-                    <a:solidFill>
-                      <a:srgbClr val="EEEDFB"/>
-                    </a:solidFill>
-                  </a:tcPr>
-                </a:tc>
-              </a:tr>
-              <a:tr h="365760">
-                <a:tc>
-                  <a:txBody>
-                    <a:bodyPr/>
-                    <a:lstStyle/>
-                    <a:p>
-                      <a:r>
-                        <a:rPr sz="1050" b="1">
-                          <a:solidFill>
-                            <a:srgbClr val="171A33"/>
-                          </a:solidFill>
-                          <a:latin typeface="Calibri"/>
-                        </a:rPr>
-                        <a:t>Aisle obstruction or debris</a:t>
-                      </a:r>
-                    </a:p>
-                  </a:txBody>
-                  <a:tcPr>
-                    <a:solidFill>
-                      <a:srgbClr val="FFFFFF"/>
-                    </a:solidFill>
-                  </a:tcPr>
-                </a:tc>
-                <a:tc>
-                  <a:txBody>
-                    <a:bodyPr/>
-                    <a:lstStyle/>
-                    <a:p>
-                      <a:r>
-                        <a:rPr sz="1050" b="0">
-                          <a:solidFill>
-                            <a:srgbClr val="171A33"/>
-                          </a:solidFill>
-                          <a:latin typeface="Calibri"/>
-                        </a:rPr>
-                        <a:t>polygon</a:t>
-                      </a:r>
-                    </a:p>
-                  </a:txBody>
-                  <a:tcPr>
-                    <a:solidFill>
-                      <a:srgbClr val="FFFFFF"/>
-                    </a:solidFill>
-                  </a:tcPr>
-                </a:tc>
-                <a:tc>
-                  <a:txBody>
-                    <a:bodyPr/>
-                    <a:lstStyle/>
-                    <a:p>
-                      <a:r>
-                        <a:rPr sz="1050" b="0">
-                          <a:solidFill>
-                            <a:srgbClr val="171A33"/>
-                          </a:solidFill>
-                          <a:latin typeface="Calibri"/>
-                        </a:rPr>
-                        <a:t>Job ad names obstructions as an SLA signal; shapes vary widely</a:t>
-                      </a:r>
-                    </a:p>
-                  </a:txBody>
-                  <a:tcPr>
-                    <a:solidFill>
-                      <a:srgbClr val="FFFFFF"/>
-                    </a:solidFill>
-                  </a:tcPr>
-                </a:tc>
-              </a:tr>
-              <a:tr h="365760">
-                <a:tc>
-                  <a:txBody>
-                    <a:bodyPr/>
-                    <a:lstStyle/>
-                    <a:p>
-                      <a:r>
-                        <a:rPr sz="1050" b="1">
-                          <a:solidFill>
-                            <a:srgbClr val="171A33"/>
-                          </a:solidFill>
-                          <a:latin typeface="Calibri"/>
-                        </a:rPr>
-                        <a:t>Scan quality flag (blur, low light, occluded)</a:t>
+                        <a:t>Scan quality: motion blur, dark aisle, occluded face</a:t>
                       </a:r>
                     </a:p>
                   </a:txBody>
@@ -7042,7 +7042,7 @@
                           </a:solidFill>
                           <a:latin typeface="Calibri"/>
                         </a:rPr>
-                        <a:t>Lets Active slice accuracy by condition and gates curation</a:t>
+                        <a:t>Explains coverage gaps and filters frames before they reach annotators</a:t>
                       </a:r>
                     </a:p>
                   </a:txBody>
@@ -7924,7 +7924,7 @@
                 </a:solidFill>
                 <a:latin typeface="Calibri"/>
               </a:rPr>
-              <a:t>Automotus, plus Encord's own warehouse-robot curation benchmark</a:t>
+              <a:t>Automotus, plus Encord's own warehouse shelf-scan benchmark</a:t>
             </a:r>
           </a:p>
         </p:txBody>
@@ -7963,7 +7963,7 @@
                 </a:solidFill>
                 <a:latin typeface="Calibri"/>
               </a:rPr>
-              <a:t>Automotus: +20% mAP, 35% smaller dataset, 33% lower labelling cost. Warehouse-robot benchmark: 61% fewer frames to label keeping 95% of racks, YOLOv8n 0.48 vs 0.43 mAP50 against a random pick of equal size.</a:t>
+              <a:t>Automotus: +20% mAP, 35% smaller dataset, 33% lower labelling cost after curating with Encord. Warehouse benchmark: 61% fewer frames to label keeping 95% of racks, YOLOv8n at 0.48 mAP50 curated versus 0.43 random at equal size.</a:t>
             </a:r>
           </a:p>
         </p:txBody>
@@ -8002,7 +8002,7 @@
                 </a:solidFill>
                 <a:latin typeface="Calibri"/>
               </a:rPr>
-              <a:t>Automotus runs fixed street cameras producing huge volumes of highly repetitive frames, the same redundancy problem as daily rack scans; curation, not more labels, moved accuracy. Our internal shelf-image benchmark is the closest direct analogue to Dexory's aisle passes.</a:t>
+              <a:t>Automotus runs fixed street cameras producing huge volumes of repetitive footage, the same redundancy problem as a daily rack scan. Our internal warehouse benchmark is closer still: public shelf images, three passes per rack, 10% degraded frames, exactly the shape of a Dexory mission.</a:t>
             </a:r>
           </a:p>
         </p:txBody>
@@ -8381,7 +8381,7 @@
                 </a:solidFill>
                 <a:latin typeface="Calibri"/>
               </a:rPr>
-              <a:t>Week 0: register one site's recent scans from Dexory's existing S3/GCS bucket in Index (data never moves), agree the slice: one or two sites, one or two weeks of scans, plus the current Storage Health class list.</a:t>
+              <a:t>Week 1, day 1 to 2: register one site's scans from their existing S3 or Azure bucket into Index; no data movement, SOC2 Type II and GDPR in place. Success: embeddings and quality metrics on one week of missions from one site.</a:t>
             </a:r>
           </a:p>
         </p:txBody>
@@ -8503,7 +8503,7 @@
                 </a:solidFill>
                 <a:latin typeface="Calibri"/>
               </a:rPr>
-              <a:t>Week 1: generate embeddings and quality metrics, de-duplicate the repeat aisle passes and build two equal-sized Collections, curated versus random. Success metric: percentage reduction in frames needed to retain agreed rack or location coverage.</a:t>
+              <a:t>Week 1, day 3 to 5: de-duplicate near-identical rack passes and build a diversity Collection. Success metric: percentage reduction in candidate frames while retaining coverage of every rack face, target 50% or better.</a:t>
             </a:r>
           </a:p>
         </p:txBody>
@@ -8625,7 +8625,7 @@
                 </a:solidFill>
                 <a:latin typeface="Calibri"/>
               </a:rPr>
-              <a:t>Week 1: import existing predictions for pallet, empty location and one Integrity class into Active; produce confusion matrix and accuracy sliced by blur, brightness and obstruction per site. Success metric: at least three named failure slices Dexory did not have visibility on.</a:t>
+              <a:t>Week 2, day 1 to 2: import their current Integrity model predictions into Active and slice performance by class, site, aisle and brightness or sharpness. Success: a named list of the three worst-performing slices tied to SLA risk.</a:t>
             </a:r>
           </a:p>
         </p:txBody>
@@ -8747,7 +8747,7 @@
                 </a:solidFill>
                 <a:latin typeface="Calibri"/>
               </a:rPr>
-              <a:t>Week 2: label the curated Collection in Annotate with the agreed ontology, using SAM 3 and tracking, and run an Agents pre-label stage on the damage class. Success metric: minutes per frame versus current baseline, plus reviewer agreement on the new classes.</a:t>
+              <a:t>Week 2, day 3 to 4: label the Active-recommended slice in Annotate with SAM 3 and an Agents pre-labelling stage using their own detector. Success: time per frame for damage polygons versus their current baseline.</a:t>
             </a:r>
           </a:p>
         </p:txBody>
@@ -8869,7 +8869,7 @@
                 </a:solidFill>
                 <a:latin typeface="Calibri"/>
               </a:rPr>
-              <a:t>Week 2: retrain or fine-tune on curated versus random picks of equal size and compare in Active. Success metric: mAP or F1 delta on a held-out site, and a cost-per-usable-label figure to take to the CFO.</a:t>
+              <a:t>Week 2, day 5: retrain or fine-tune on curated versus random picks of equal size and compare in Active. Success: measurable mAP or recall gain on damaged and leaning pallet classes, plus a cost-per-labelled-frame figure for the business case.</a:t>
             </a:r>
           </a:p>
         </p:txBody>
@@ -9126,7 +9126,7 @@
                 </a:solidFill>
                 <a:latin typeface="Calibri"/>
               </a:rPr>
-              <a:t>•  When you added the Storage Health classes, how many frames did you label to get the first usable model, and how did you choose those frames out of the daily scans?</a:t>
+              <a:t>•  How is perception accuracy defined and measured per site today, and who is accountable when a site drifts below the committed SLA?</a:t>
             </a:r>
           </a:p>
           <a:p>
@@ -9142,7 +9142,7 @@
                 </a:solidFill>
                 <a:latin typeface="Calibri"/>
               </a:rPr>
-              <a:t>•  Across a week of scans at one site, what proportion do you actually keep for training, and what decides that today?</a:t>
+              <a:t>•  When you launched the new Integrity classes for damage and rack compliance, how many frames did you label and how long did it take from decision to deployed model?</a:t>
             </a:r>
           </a:p>
           <a:p>
@@ -9158,7 +9158,7 @@
                 </a:solidFill>
                 <a:latin typeface="Calibri"/>
               </a:rPr>
-              <a:t>•  When a site misses its perception accuracy SLA, how long does it take to find out whether it is lighting, blur, obstruction, rack type or a genuine model gap?</a:t>
+              <a:t>•  Of the frames a robot captures in a daily scan, roughly what fraction ever reaches an annotator, and how do you choose them?</a:t>
             </a:r>
           </a:p>
           <a:p>
@@ -9174,7 +9174,7 @@
                 </a:solidFill>
                 <a:latin typeface="Calibri"/>
               </a:rPr>
-              <a:t>•  Who labels today: internal ops reviewers, an outsourced vendor, or a tool your team built, and what is the per-class cost of that?</a:t>
+              <a:t>•  What happens operationally when a customer disputes a discrepancy flag: does that frame get back into the training set, and can you find similar frames across other sites?</a:t>
             </a:r>
           </a:p>
           <a:p>
@@ -9190,7 +9190,7 @@
                 </a:solidFill>
                 <a:latin typeface="Calibri"/>
               </a:rPr>
-              <a:t>•  The Senior Data Engineer ad mentions modelling perception accuracy against per-site SLAs in Databricks. Is that metric currently produced by the perception team by hand?</a:t>
+              <a:t>•  Can customer imagery from Iron Mountain or Stellantis sites leave your own cloud storage, and what does that rule out tool-wise?</a:t>
             </a:r>
           </a:p>
         </p:txBody>
